--- a/.extraDocs/Universal Drag & Drop.pptx
+++ b/.extraDocs/Universal Drag & Drop.pptx
@@ -1,6 +1,6 @@
 
 <file path=ppt/presentation.xml><?xml version="1.0" encoding="utf-8"?>
-<p:presentation xmlns:a="http://schemas.openxmlformats.org/drawingml/2006/main" xmlns:r="http://schemas.openxmlformats.org/officeDocument/2006/relationships" xmlns:mc="http://schemas.openxmlformats.org/markup-compatibility/2006" xmlns:mv="urn:schemas-microsoft-com:mac:vml" xmlns:p="http://schemas.openxmlformats.org/presentationml/2006/main" xmlns:c="http://schemas.openxmlformats.org/drawingml/2006/chart" xmlns:dgm="http://schemas.openxmlformats.org/drawingml/2006/diagram" xmlns:o="urn:schemas-microsoft-com:office:office" xmlns:v="urn:schemas-microsoft-com:vml" xmlns:pvml="urn:schemas-microsoft-com:office:powerpoint" xmlns:com="http://schemas.openxmlformats.org/drawingml/2006/compatibility" xmlns:p14="http://schemas.microsoft.com/office/powerpoint/2010/main" xmlns:p15="http://schemas.microsoft.com/office/powerpoint/2012/main" xmlns:ahyp="http://schemas.microsoft.com/office/drawing/2018/hyperlinkcolor" autoCompressPictures="0" embedTrueTypeFonts="1" strictFirstAndLastChars="0" saveSubsetFonts="1">
+<p:presentation xmlns:a="http://schemas.openxmlformats.org/drawingml/2006/main" xmlns:ns3="http://schemas.microsoft.com/office/powerpoint/2012/main" xmlns:p="http://schemas.openxmlformats.org/presentationml/2006/main" xmlns:r="http://schemas.openxmlformats.org/officeDocument/2006/relationships" autoCompressPictures="0" embedTrueTypeFonts="1" strictFirstAndLastChars="0" saveSubsetFonts="1">
   <p:sldMasterIdLst>
     <p:sldMasterId id="2147483659" r:id="rId4"/>
   </p:sldMasterIdLst>
@@ -11,6 +11,10 @@
     <p:sldId id="256" r:id="rId6"/>
     <p:sldId id="257" r:id="rId7"/>
     <p:sldId id="258" r:id="rId8"/>
+    <p:sldId id="259" r:id="rId9"/>
+    <p:sldId id="260" r:id="rId10"/>
+    <p:sldId id="261" r:id="rId11"/>
+    <p:sldId id="262" r:id="rId12"/>
   </p:sldIdLst>
   <p:sldSz cy="5143500" cx="9144000"/>
   <p:notesSz cx="6858000" cy="9144000"/>
@@ -256,18 +260,18 @@
   </p:defaultTextStyle>
   <p:extLst>
     <p:ext uri="{EFAFB233-063F-42B5-8137-9DF3F51BA10A}">
-      <p15:sldGuideLst>
-        <p15:guide id="1" orient="horz" pos="1620">
-          <p15:clr>
+      <ns3:sldGuideLst>
+        <ns3:guide id="1" orient="horz" pos="1620">
+          <ns3:clr>
             <a:srgbClr val="747775"/>
-          </p15:clr>
-        </p15:guide>
-        <p15:guide id="2" pos="2880">
-          <p15:clr>
+          </ns3:clr>
+        </ns3:guide>
+        <ns3:guide id="2" pos="2880">
+          <ns3:clr>
             <a:srgbClr val="747775"/>
-          </p15:clr>
-        </p15:guide>
-      </p15:sldGuideLst>
+          </ns3:clr>
+        </ns3:guide>
+      </ns3:sldGuideLst>
     </p:ext>
   </p:extLst>
 </p:presentation>
@@ -6215,7 +6219,7 @@
 </file>
 
 <file path=ppt/slides/slide1.xml><?xml version="1.0" encoding="utf-8"?>
-<p:sld xmlns:a="http://schemas.openxmlformats.org/drawingml/2006/main" xmlns:r="http://schemas.openxmlformats.org/officeDocument/2006/relationships" xmlns:mc="http://schemas.openxmlformats.org/markup-compatibility/2006" xmlns:mv="urn:schemas-microsoft-com:mac:vml" xmlns:p="http://schemas.openxmlformats.org/presentationml/2006/main" xmlns:c="http://schemas.openxmlformats.org/drawingml/2006/chart" xmlns:dgm="http://schemas.openxmlformats.org/drawingml/2006/diagram" xmlns:o="urn:schemas-microsoft-com:office:office" xmlns:v="urn:schemas-microsoft-com:vml" xmlns:pvml="urn:schemas-microsoft-com:office:powerpoint" xmlns:com="http://schemas.openxmlformats.org/drawingml/2006/compatibility" xmlns:p14="http://schemas.microsoft.com/office/powerpoint/2010/main" xmlns:p15="http://schemas.microsoft.com/office/powerpoint/2012/main" xmlns:ahyp="http://schemas.microsoft.com/office/drawing/2018/hyperlinkcolor">
+<p:sld xmlns:a="http://schemas.openxmlformats.org/drawingml/2006/main" xmlns:p="http://schemas.openxmlformats.org/presentationml/2006/main">
   <p:cSld>
     <p:spTree>
       <p:nvGrpSpPr>
@@ -6264,10 +6268,26 @@
               <a:buNone/>
             </a:pPr>
             <a:r>
-              <a:rPr lang="ru"/>
+              <a:rPr lang="en" sz="4800" b="1">
+                <a:solidFill>
+                  <a:schemeClr val="dk1"/>
+                </a:solidFill>
+                <a:latin typeface="Oswald"/>
+                <a:ea typeface="Oswald"/>
+                <a:cs typeface="Oswald"/>
+                <a:sym typeface="Oswald"/>
+              </a:rPr>
               <a:t>Universal Drag &amp; Drop</a:t>
             </a:r>
-            <a:endParaRPr/>
+            <a:endParaRPr sz="4800">
+              <a:solidFill>
+                <a:schemeClr val="dk1"/>
+              </a:solidFill>
+              <a:latin typeface="Oswald"/>
+              <a:ea typeface="Oswald"/>
+              <a:cs typeface="Oswald"/>
+              <a:sym typeface="Oswald"/>
+            </a:endParaRPr>
           </a:p>
         </p:txBody>
       </p:sp>
@@ -6304,9 +6324,27 @@
               <a:buNone/>
             </a:pPr>
             <a:r>
-              <a:t/>
+              <a:rPr lang="en" sz="2100">
+                <a:solidFill>
+                  <a:schemeClr val="dk2"/>
+                </a:solidFill>
+                <a:latin typeface="Average"/>
+                <a:ea typeface="Average"/>
+                <a:cs typeface="Average"/>
+                <a:sym typeface="Average"/>
+              </a:rPr>
+              <a:t>Flexible inventory framework for Unity
+UGUI drag and drop, data binding, rules, and transfer pipeline</a:t>
             </a:r>
-            <a:endParaRPr/>
+            <a:endParaRPr sz="2100">
+              <a:solidFill>
+                <a:schemeClr val="dk2"/>
+              </a:solidFill>
+              <a:latin typeface="Average"/>
+              <a:ea typeface="Average"/>
+              <a:cs typeface="Average"/>
+              <a:sym typeface="Average"/>
+            </a:endParaRPr>
           </a:p>
         </p:txBody>
       </p:sp>
@@ -7872,7 +7910,7 @@
 </file>
 
 <file path=ppt/slides/slide3.xml><?xml version="1.0" encoding="utf-8"?>
-<p:sld xmlns:a="http://schemas.openxmlformats.org/drawingml/2006/main" xmlns:r="http://schemas.openxmlformats.org/officeDocument/2006/relationships" xmlns:mc="http://schemas.openxmlformats.org/markup-compatibility/2006" xmlns:mv="urn:schemas-microsoft-com:mac:vml" xmlns:p="http://schemas.openxmlformats.org/presentationml/2006/main" xmlns:c="http://schemas.openxmlformats.org/drawingml/2006/chart" xmlns:dgm="http://schemas.openxmlformats.org/drawingml/2006/diagram" xmlns:o="urn:schemas-microsoft-com:office:office" xmlns:v="urn:schemas-microsoft-com:vml" xmlns:pvml="urn:schemas-microsoft-com:office:powerpoint" xmlns:com="http://schemas.openxmlformats.org/drawingml/2006/compatibility" xmlns:p14="http://schemas.microsoft.com/office/powerpoint/2010/main" xmlns:p15="http://schemas.microsoft.com/office/powerpoint/2012/main" xmlns:ahyp="http://schemas.microsoft.com/office/drawing/2018/hyperlinkcolor">
+<p:sld xmlns:a="http://schemas.openxmlformats.org/drawingml/2006/main" xmlns:p="http://schemas.openxmlformats.org/presentationml/2006/main">
   <p:cSld>
     <p:spTree>
       <p:nvGrpSpPr>
@@ -7921,9 +7959,26 @@
               <a:buNone/>
             </a:pPr>
             <a:r>
-              <a:t/>
+              <a:rPr lang="en" sz="3000">
+                <a:solidFill>
+                  <a:schemeClr val="accent3"/>
+                </a:solidFill>
+                <a:latin typeface="Average"/>
+                <a:ea typeface="Average"/>
+                <a:cs typeface="Average"/>
+                <a:sym typeface="Average"/>
+              </a:rPr>
+              <a:t>Why teams pick this asset</a:t>
             </a:r>
-            <a:endParaRPr/>
+            <a:endParaRPr sz="3000">
+              <a:solidFill>
+                <a:schemeClr val="accent3"/>
+              </a:solidFill>
+              <a:latin typeface="Average"/>
+              <a:ea typeface="Average"/>
+              <a:cs typeface="Average"/>
+              <a:sym typeface="Average"/>
+            </a:endParaRPr>
           </a:p>
         </p:txBody>
       </p:sp>
@@ -7960,9 +8015,942 @@
               <a:buNone/>
             </a:pPr>
             <a:r>
-              <a:t/>
+              <a:rPr lang="en" sz="2200">
+                <a:solidFill>
+                  <a:schemeClr val="dk2"/>
+                </a:solidFill>
+              </a:rPr>
+              <a:t>Backpack, chest, equipment, loot, trading, crafting, and nested containers</a:t>
             </a:r>
-            <a:endParaRPr/>
+            <a:endParaRPr sz="2200">
+              <a:solidFill>
+                <a:schemeClr val="dk2"/>
+              </a:solidFill>
+            </a:endParaRPr>
+          </a:p>
+          <a:p>
+            <a:pPr indent="0" lvl="0" marL="0" rtl="0" algn="l">
+              <a:spcBef>
+                <a:spcPts val="0"/>
+              </a:spcBef>
+              <a:spcAft>
+                <a:spcPts val="1200"/>
+              </a:spcAft>
+              <a:buNone/>
+            </a:pPr>
+            <a:r>
+              <a:rPr lang="en" sz="2200">
+                <a:solidFill>
+                  <a:schemeClr val="dk2"/>
+                </a:solidFill>
+              </a:rPr>
+              <a:t>Stack, swap, quick transfer, multi-selection, context menu, and tooltip support</a:t>
+            </a:r>
+            <a:endParaRPr sz="2200">
+              <a:solidFill>
+                <a:schemeClr val="dk2"/>
+              </a:solidFill>
+            </a:endParaRPr>
+          </a:p>
+          <a:p>
+            <a:pPr indent="0" lvl="0" marL="0" rtl="0" algn="l">
+              <a:spcBef>
+                <a:spcPts val="0"/>
+              </a:spcBef>
+              <a:spcAft>
+                <a:spcPts val="1200"/>
+              </a:spcAft>
+              <a:buNone/>
+            </a:pPr>
+            <a:r>
+              <a:rPr lang="en" sz="2200">
+                <a:solidFill>
+                  <a:schemeClr val="dk2"/>
+                </a:solidFill>
+              </a:rPr>
+              <a:t>Start with a simple inventory and scale without rewriting the whole UI flow</a:t>
+            </a:r>
+            <a:endParaRPr sz="2200">
+              <a:solidFill>
+                <a:schemeClr val="dk2"/>
+              </a:solidFill>
+            </a:endParaRPr>
+          </a:p>
+          <a:p>
+            <a:pPr indent="0" lvl="0" marL="0" rtl="0" algn="l">
+              <a:spcBef>
+                <a:spcPts val="0"/>
+              </a:spcBef>
+              <a:spcAft>
+                <a:spcPts val="1200"/>
+              </a:spcAft>
+              <a:buNone/>
+            </a:pPr>
+            <a:r>
+              <a:rPr lang="en" sz="2200">
+                <a:solidFill>
+                  <a:schemeClr val="dk2"/>
+                </a:solidFill>
+              </a:rPr>
+              <a:t>UGUI required, New Input System optional for InputAction-based features</a:t>
+            </a:r>
+            <a:endParaRPr sz="2200">
+              <a:solidFill>
+                <a:schemeClr val="dk2"/>
+              </a:solidFill>
+            </a:endParaRPr>
+          </a:p>
+        </p:txBody>
+      </p:sp>
+    </p:spTree>
+  </p:cSld>
+  <p:clrMapOvr>
+    <a:masterClrMapping/>
+  </p:clrMapOvr>
+</p:sld>
+</file>
+
+<file path=ppt/slides/slide4.xml><?xml version="1.0" encoding="utf-8"?>
+<p:sld xmlns:a="http://schemas.openxmlformats.org/drawingml/2006/main" xmlns:p="http://schemas.openxmlformats.org/presentationml/2006/main">
+  <p:cSld>
+    <p:spTree>
+      <p:nvGrpSpPr>
+        <p:cNvPr id="97" name="Shape 97"/>
+        <p:cNvGrpSpPr/>
+        <p:nvPr/>
+      </p:nvGrpSpPr>
+      <p:grpSpPr>
+        <a:xfrm>
+          <a:off x="0" y="0"/>
+          <a:ext cx="0" cy="0"/>
+          <a:chOff x="0" y="0"/>
+          <a:chExt cx="0" cy="0"/>
+        </a:xfrm>
+      </p:grpSpPr>
+      <p:sp>
+        <p:nvSpPr>
+          <p:cNvPr id="98" name="Google Shape;98;p15"/>
+          <p:cNvSpPr txBox="1"/>
+          <p:nvPr>
+            <p:ph type="title"/>
+          </p:nvPr>
+        </p:nvSpPr>
+        <p:spPr>
+          <a:xfrm>
+            <a:off x="311700" y="445025"/>
+            <a:ext cx="8520600" cy="572700"/>
+          </a:xfrm>
+          <a:prstGeom prst="rect">
+            <a:avLst/>
+          </a:prstGeom>
+        </p:spPr>
+        <p:txBody>
+          <a:bodyPr anchorCtr="0" anchor="t" bIns="91425" lIns="91425" spcFirstLastPara="1" rIns="91425" wrap="square" tIns="91425">
+            <a:normAutofit fontScale="90000"/>
+          </a:bodyPr>
+          <a:lstStyle/>
+          <a:p>
+            <a:pPr indent="0" lvl="0" marL="0" rtl="0" algn="l">
+              <a:spcBef>
+                <a:spcPts val="0"/>
+              </a:spcBef>
+              <a:spcAft>
+                <a:spcPts val="0"/>
+              </a:spcAft>
+              <a:buNone/>
+            </a:pPr>
+            <a:r>
+              <a:rPr lang="en" sz="3000">
+                <a:solidFill>
+                  <a:schemeClr val="accent3"/>
+                </a:solidFill>
+                <a:latin typeface="Average"/>
+                <a:ea typeface="Average"/>
+                <a:cs typeface="Average"/>
+                <a:sym typeface="Average"/>
+              </a:rPr>
+              <a:t>5 demo scenes included</a:t>
+            </a:r>
+            <a:endParaRPr sz="3000">
+              <a:solidFill>
+                <a:schemeClr val="accent3"/>
+              </a:solidFill>
+              <a:latin typeface="Average"/>
+              <a:ea typeface="Average"/>
+              <a:cs typeface="Average"/>
+              <a:sym typeface="Average"/>
+            </a:endParaRPr>
+          </a:p>
+        </p:txBody>
+      </p:sp>
+      <p:sp>
+        <p:nvSpPr>
+          <p:cNvPr id="99" name="Google Shape;99;p15"/>
+          <p:cNvSpPr txBox="1"/>
+          <p:nvPr>
+            <p:ph idx="1" type="body"/>
+          </p:nvPr>
+        </p:nvSpPr>
+        <p:spPr>
+          <a:xfrm>
+            <a:off x="311700" y="1152475"/>
+            <a:ext cx="8520600" cy="3416400"/>
+          </a:xfrm>
+          <a:prstGeom prst="rect">
+            <a:avLst/>
+          </a:prstGeom>
+        </p:spPr>
+        <p:txBody>
+          <a:bodyPr anchorCtr="0" anchor="t" bIns="91425" lIns="91425" spcFirstLastPara="1" rIns="91425" wrap="square" tIns="91425">
+            <a:normAutofit/>
+          </a:bodyPr>
+          <a:lstStyle/>
+          <a:p>
+            <a:pPr indent="0" lvl="0" marL="0" rtl="0" algn="l">
+              <a:spcBef>
+                <a:spcPts val="0"/>
+              </a:spcBef>
+              <a:spcAft>
+                <a:spcPts val="1200"/>
+              </a:spcAft>
+              <a:buNone/>
+            </a:pPr>
+            <a:r>
+              <a:rPr lang="en" sz="2200">
+                <a:solidFill>
+                  <a:schemeClr val="dk2"/>
+                </a:solidFill>
+              </a:rPr>
+              <a:t>Demo1: basic inventories and list-based binding</a:t>
+            </a:r>
+            <a:endParaRPr sz="2200">
+              <a:solidFill>
+                <a:schemeClr val="dk2"/>
+              </a:solidFill>
+            </a:endParaRPr>
+          </a:p>
+          <a:p>
+            <a:pPr indent="0" lvl="0" marL="0" rtl="0" algn="l">
+              <a:spcBef>
+                <a:spcPts val="0"/>
+              </a:spcBef>
+              <a:spcAft>
+                <a:spcPts val="1200"/>
+              </a:spcAft>
+              <a:buNone/>
+            </a:pPr>
+            <a:r>
+              <a:rPr lang="en" sz="2200">
+                <a:solidFill>
+                  <a:schemeClr val="dk2"/>
+                </a:solidFill>
+              </a:rPr>
+              <a:t>Demo2: loot, chest interaction, pickup, and world drop flow</a:t>
+            </a:r>
+            <a:endParaRPr sz="2200">
+              <a:solidFill>
+                <a:schemeClr val="dk2"/>
+              </a:solidFill>
+            </a:endParaRPr>
+          </a:p>
+          <a:p>
+            <a:pPr indent="0" lvl="0" marL="0" rtl="0" algn="l">
+              <a:spcBef>
+                <a:spcPts val="0"/>
+              </a:spcBef>
+              <a:spcAft>
+                <a:spcPts val="1200"/>
+              </a:spcAft>
+              <a:buNone/>
+            </a:pPr>
+            <a:r>
+              <a:rPr lang="en" sz="2200">
+                <a:solidFill>
+                  <a:schemeClr val="dk2"/>
+                </a:solidFill>
+              </a:rPr>
+              <a:t>Demo3: hotbar, slot-indexed inventory, and crafting result slot</a:t>
+            </a:r>
+            <a:endParaRPr sz="2200">
+              <a:solidFill>
+                <a:schemeClr val="dk2"/>
+              </a:solidFill>
+            </a:endParaRPr>
+          </a:p>
+          <a:p>
+            <a:pPr indent="0" lvl="0" marL="0" rtl="0" algn="l">
+              <a:spcBef>
+                <a:spcPts val="0"/>
+              </a:spcBef>
+              <a:spcAft>
+                <a:spcPts val="1200"/>
+              </a:spcAft>
+              <a:buNone/>
+            </a:pPr>
+            <a:r>
+              <a:rPr lang="en" sz="2200">
+                <a:solidFill>
+                  <a:schemeClr val="dk2"/>
+                </a:solidFill>
+              </a:rPr>
+              <a:t>Demo4: trading, prices, and item conversion between inventories</a:t>
+            </a:r>
+            <a:endParaRPr sz="2200">
+              <a:solidFill>
+                <a:schemeClr val="dk2"/>
+              </a:solidFill>
+            </a:endParaRPr>
+          </a:p>
+          <a:p>
+            <a:pPr indent="0" lvl="0" marL="0" rtl="0" algn="l">
+              <a:spcBef>
+                <a:spcPts val="0"/>
+              </a:spcBef>
+              <a:spcAft>
+                <a:spcPts val="1200"/>
+              </a:spcAft>
+              <a:buNone/>
+            </a:pPr>
+            <a:r>
+              <a:rPr lang="en" sz="2200">
+                <a:solidFill>
+                  <a:schemeClr val="dk2"/>
+                </a:solidFill>
+              </a:rPr>
+              <a:t>Demo5: nested containers opened from a context menu</a:t>
+            </a:r>
+            <a:endParaRPr sz="2200">
+              <a:solidFill>
+                <a:schemeClr val="dk2"/>
+              </a:solidFill>
+            </a:endParaRPr>
+          </a:p>
+        </p:txBody>
+      </p:sp>
+    </p:spTree>
+  </p:cSld>
+  <p:clrMapOvr>
+    <a:masterClrMapping/>
+  </p:clrMapOvr>
+</p:sld>
+</file>
+
+<file path=ppt/slides/slide5.xml><?xml version="1.0" encoding="utf-8"?>
+<p:sld xmlns:a="http://schemas.openxmlformats.org/drawingml/2006/main" xmlns:p="http://schemas.openxmlformats.org/presentationml/2006/main">
+  <p:cSld>
+    <p:spTree>
+      <p:nvGrpSpPr>
+        <p:cNvPr id="97" name="Shape 97"/>
+        <p:cNvGrpSpPr/>
+        <p:nvPr/>
+      </p:nvGrpSpPr>
+      <p:grpSpPr>
+        <a:xfrm>
+          <a:off x="0" y="0"/>
+          <a:ext cx="0" cy="0"/>
+          <a:chOff x="0" y="0"/>
+          <a:chExt cx="0" cy="0"/>
+        </a:xfrm>
+      </p:grpSpPr>
+      <p:sp>
+        <p:nvSpPr>
+          <p:cNvPr id="98" name="Google Shape;98;p15"/>
+          <p:cNvSpPr txBox="1"/>
+          <p:nvPr>
+            <p:ph type="title"/>
+          </p:nvPr>
+        </p:nvSpPr>
+        <p:spPr>
+          <a:xfrm>
+            <a:off x="311700" y="445025"/>
+            <a:ext cx="8520600" cy="572700"/>
+          </a:xfrm>
+          <a:prstGeom prst="rect">
+            <a:avLst/>
+          </a:prstGeom>
+        </p:spPr>
+        <p:txBody>
+          <a:bodyPr anchorCtr="0" anchor="t" bIns="91425" lIns="91425" spcFirstLastPara="1" rIns="91425" wrap="square" tIns="91425">
+            <a:normAutofit fontScale="90000"/>
+          </a:bodyPr>
+          <a:lstStyle/>
+          <a:p>
+            <a:pPr indent="0" lvl="0" marL="0" rtl="0" algn="l">
+              <a:spcBef>
+                <a:spcPts val="0"/>
+              </a:spcBef>
+              <a:spcAft>
+                <a:spcPts val="0"/>
+              </a:spcAft>
+              <a:buNone/>
+            </a:pPr>
+            <a:r>
+              <a:rPr lang="en" sz="3000">
+                <a:solidFill>
+                  <a:schemeClr val="accent3"/>
+                </a:solidFill>
+                <a:latin typeface="Average"/>
+                <a:ea typeface="Average"/>
+                <a:cs typeface="Average"/>
+                <a:sym typeface="Average"/>
+              </a:rPr>
+              <a:t>Works with your own data model</a:t>
+            </a:r>
+            <a:endParaRPr sz="3000">
+              <a:solidFill>
+                <a:schemeClr val="accent3"/>
+              </a:solidFill>
+              <a:latin typeface="Average"/>
+              <a:ea typeface="Average"/>
+              <a:cs typeface="Average"/>
+              <a:sym typeface="Average"/>
+            </a:endParaRPr>
+          </a:p>
+        </p:txBody>
+      </p:sp>
+      <p:sp>
+        <p:nvSpPr>
+          <p:cNvPr id="99" name="Google Shape;99;p15"/>
+          <p:cNvSpPr txBox="1"/>
+          <p:nvPr>
+            <p:ph idx="1" type="body"/>
+          </p:nvPr>
+        </p:nvSpPr>
+        <p:spPr>
+          <a:xfrm>
+            <a:off x="311700" y="1152475"/>
+            <a:ext cx="8520600" cy="3416400"/>
+          </a:xfrm>
+          <a:prstGeom prst="rect">
+            <a:avLst/>
+          </a:prstGeom>
+        </p:spPr>
+        <p:txBody>
+          <a:bodyPr anchorCtr="0" anchor="t" bIns="91425" lIns="91425" spcFirstLastPara="1" rIns="91425" wrap="square" tIns="91425">
+            <a:normAutofit/>
+          </a:bodyPr>
+          <a:lstStyle/>
+          <a:p>
+            <a:pPr indent="0" lvl="0" marL="0" rtl="0" algn="l">
+              <a:spcBef>
+                <a:spcPts val="0"/>
+              </a:spcBef>
+              <a:spcAft>
+                <a:spcPts val="1200"/>
+              </a:spcAft>
+              <a:buNone/>
+            </a:pPr>
+            <a:r>
+              <a:rPr lang="en" sz="2200">
+                <a:solidFill>
+                  <a:schemeClr val="dk2"/>
+                </a:solidFill>
+              </a:rPr>
+              <a:t>Supports ScriptableObject items, runtime models, lists, slot arrays, and mapped equipment slots</a:t>
+            </a:r>
+            <a:endParaRPr sz="2200">
+              <a:solidFill>
+                <a:schemeClr val="dk2"/>
+              </a:solidFill>
+            </a:endParaRPr>
+          </a:p>
+          <a:p>
+            <a:pPr indent="0" lvl="0" marL="0" rtl="0" algn="l">
+              <a:spcBef>
+                <a:spcPts val="0"/>
+              </a:spcBef>
+              <a:spcAft>
+                <a:spcPts val="1200"/>
+              </a:spcAft>
+              <a:buNone/>
+            </a:pPr>
+            <a:r>
+              <a:rPr lang="en" sz="2200">
+                <a:solidFill>
+                  <a:schemeClr val="dk2"/>
+                </a:solidFill>
+              </a:rPr>
+              <a:t>Adapters define how items look in UI and how stacking identity is resolved</a:t>
+            </a:r>
+            <a:endParaRPr sz="2200">
+              <a:solidFill>
+                <a:schemeClr val="dk2"/>
+              </a:solidFill>
+            </a:endParaRPr>
+          </a:p>
+          <a:p>
+            <a:pPr indent="0" lvl="0" marL="0" rtl="0" algn="l">
+              <a:spcBef>
+                <a:spcPts val="0"/>
+              </a:spcBef>
+              <a:spcAft>
+                <a:spcPts val="1200"/>
+              </a:spcAft>
+              <a:buNone/>
+            </a:pPr>
+            <a:r>
+              <a:rPr lang="en" sz="2200">
+                <a:solidFill>
+                  <a:schemeClr val="dk2"/>
+                </a:solidFill>
+              </a:rPr>
+              <a:t>DataBinding keeps your game data as the source of truth instead of storing state in UI slots</a:t>
+            </a:r>
+            <a:endParaRPr sz="2200">
+              <a:solidFill>
+                <a:schemeClr val="dk2"/>
+              </a:solidFill>
+            </a:endParaRPr>
+          </a:p>
+          <a:p>
+            <a:pPr indent="0" lvl="0" marL="0" rtl="0" algn="l">
+              <a:spcBef>
+                <a:spcPts val="0"/>
+              </a:spcBef>
+              <a:spcAft>
+                <a:spcPts val="1200"/>
+              </a:spcAft>
+              <a:buNone/>
+            </a:pPr>
+            <a:r>
+              <a:rPr lang="en" sz="2200">
+                <a:solidFill>
+                  <a:schemeClr val="dk2"/>
+                </a:solidFill>
+              </a:rPr>
+              <a:t>You only add the integration layer that your project actually needs</a:t>
+            </a:r>
+            <a:endParaRPr sz="2200">
+              <a:solidFill>
+                <a:schemeClr val="dk2"/>
+              </a:solidFill>
+            </a:endParaRPr>
+          </a:p>
+        </p:txBody>
+      </p:sp>
+    </p:spTree>
+  </p:cSld>
+  <p:clrMapOvr>
+    <a:masterClrMapping/>
+  </p:clrMapOvr>
+</p:sld>
+</file>
+
+<file path=ppt/slides/slide6.xml><?xml version="1.0" encoding="utf-8"?>
+<p:sld xmlns:a="http://schemas.openxmlformats.org/drawingml/2006/main" xmlns:p="http://schemas.openxmlformats.org/presentationml/2006/main">
+  <p:cSld>
+    <p:spTree>
+      <p:nvGrpSpPr>
+        <p:cNvPr id="97" name="Shape 97"/>
+        <p:cNvGrpSpPr/>
+        <p:nvPr/>
+      </p:nvGrpSpPr>
+      <p:grpSpPr>
+        <a:xfrm>
+          <a:off x="0" y="0"/>
+          <a:ext cx="0" cy="0"/>
+          <a:chOff x="0" y="0"/>
+          <a:chExt cx="0" cy="0"/>
+        </a:xfrm>
+      </p:grpSpPr>
+      <p:sp>
+        <p:nvSpPr>
+          <p:cNvPr id="98" name="Google Shape;98;p15"/>
+          <p:cNvSpPr txBox="1"/>
+          <p:nvPr>
+            <p:ph type="title"/>
+          </p:nvPr>
+        </p:nvSpPr>
+        <p:spPr>
+          <a:xfrm>
+            <a:off x="311700" y="445025"/>
+            <a:ext cx="8520600" cy="572700"/>
+          </a:xfrm>
+          <a:prstGeom prst="rect">
+            <a:avLst/>
+          </a:prstGeom>
+        </p:spPr>
+        <p:txBody>
+          <a:bodyPr anchorCtr="0" anchor="t" bIns="91425" lIns="91425" spcFirstLastPara="1" rIns="91425" wrap="square" tIns="91425">
+            <a:normAutofit fontScale="90000"/>
+          </a:bodyPr>
+          <a:lstStyle/>
+          <a:p>
+            <a:pPr indent="0" lvl="0" marL="0" rtl="0" algn="l">
+              <a:spcBef>
+                <a:spcPts val="0"/>
+              </a:spcBef>
+              <a:spcAft>
+                <a:spcPts val="0"/>
+              </a:spcAft>
+              <a:buNone/>
+            </a:pPr>
+            <a:r>
+              <a:rPr lang="en" sz="3000">
+                <a:solidFill>
+                  <a:schemeClr val="accent3"/>
+                </a:solidFill>
+                <a:latin typeface="Average"/>
+                <a:ea typeface="Average"/>
+                <a:cs typeface="Average"/>
+                <a:sym typeface="Average"/>
+              </a:rPr>
+              <a:t>Transfer pipeline with extension points</a:t>
+            </a:r>
+            <a:endParaRPr sz="3000">
+              <a:solidFill>
+                <a:schemeClr val="accent3"/>
+              </a:solidFill>
+              <a:latin typeface="Average"/>
+              <a:ea typeface="Average"/>
+              <a:cs typeface="Average"/>
+              <a:sym typeface="Average"/>
+            </a:endParaRPr>
+          </a:p>
+        </p:txBody>
+      </p:sp>
+      <p:sp>
+        <p:nvSpPr>
+          <p:cNvPr id="99" name="Google Shape;99;p15"/>
+          <p:cNvSpPr txBox="1"/>
+          <p:nvPr>
+            <p:ph idx="1" type="body"/>
+          </p:nvPr>
+        </p:nvSpPr>
+        <p:spPr>
+          <a:xfrm>
+            <a:off x="311700" y="1152475"/>
+            <a:ext cx="8520600" cy="3416400"/>
+          </a:xfrm>
+          <a:prstGeom prst="rect">
+            <a:avLst/>
+          </a:prstGeom>
+        </p:spPr>
+        <p:txBody>
+          <a:bodyPr anchorCtr="0" anchor="t" bIns="91425" lIns="91425" spcFirstLastPara="1" rIns="91425" wrap="square" tIns="91425">
+            <a:normAutofit/>
+          </a:bodyPr>
+          <a:lstStyle/>
+          <a:p>
+            <a:pPr indent="0" lvl="0" marL="0" rtl="0" algn="l">
+              <a:spcBef>
+                <a:spcPts val="0"/>
+              </a:spcBef>
+              <a:spcAft>
+                <a:spcPts val="1200"/>
+              </a:spcAft>
+              <a:buNone/>
+            </a:pPr>
+            <a:r>
+              <a:rPr lang="en" sz="2200">
+                <a:solidFill>
+                  <a:schemeClr val="dk2"/>
+                </a:solidFill>
+              </a:rPr>
+              <a:t>CanDrop handles mechanical rules during planning before any mutation happens</a:t>
+            </a:r>
+            <a:endParaRPr sz="2200">
+              <a:solidFill>
+                <a:schemeClr val="dk2"/>
+              </a:solidFill>
+            </a:endParaRPr>
+          </a:p>
+          <a:p>
+            <a:pPr indent="0" lvl="0" marL="0" rtl="0" algn="l">
+              <a:spcBef>
+                <a:spcPts val="0"/>
+              </a:spcBef>
+              <a:spcAft>
+                <a:spcPts val="1200"/>
+              </a:spcAft>
+              <a:buNone/>
+            </a:pPr>
+            <a:r>
+              <a:rPr lang="en" sz="2200">
+                <a:solidFill>
+                  <a:schemeClr val="dk2"/>
+                </a:solidFill>
+              </a:rPr>
+              <a:t>CanCommitTransfer and CanCommitTransferAsync validate business logic right before commit</a:t>
+            </a:r>
+            <a:endParaRPr sz="2200">
+              <a:solidFill>
+                <a:schemeClr val="dk2"/>
+              </a:solidFill>
+            </a:endParaRPr>
+          </a:p>
+          <a:p>
+            <a:pPr indent="0" lvl="0" marL="0" rtl="0" algn="l">
+              <a:spcBef>
+                <a:spcPts val="0"/>
+              </a:spcBef>
+              <a:spcAft>
+                <a:spcPts val="1200"/>
+              </a:spcAft>
+              <a:buNone/>
+            </a:pPr>
+            <a:r>
+              <a:rPr lang="en" sz="2200">
+                <a:solidFill>
+                  <a:schemeClr val="dk2"/>
+                </a:solidFill>
+              </a:rPr>
+              <a:t>Planning, partial transfer, swap, conversion, and rollback are already handled by the system</a:t>
+            </a:r>
+            <a:endParaRPr sz="2200">
+              <a:solidFill>
+                <a:schemeClr val="dk2"/>
+              </a:solidFill>
+            </a:endParaRPr>
+          </a:p>
+          <a:p>
+            <a:pPr indent="0" lvl="0" marL="0" rtl="0" algn="l">
+              <a:spcBef>
+                <a:spcPts val="0"/>
+              </a:spcBef>
+              <a:spcAft>
+                <a:spcPts val="1200"/>
+              </a:spcAft>
+              <a:buNone/>
+            </a:pPr>
+            <a:r>
+              <a:rPr lang="en" sz="2200">
+                <a:solidFill>
+                  <a:schemeClr val="dk2"/>
+                </a:solidFill>
+              </a:rPr>
+              <a:t>OnTransferSucceeded plus AddToData and RemoveFromData cover side effects and sync</a:t>
+            </a:r>
+            <a:endParaRPr sz="2200">
+              <a:solidFill>
+                <a:schemeClr val="dk2"/>
+              </a:solidFill>
+            </a:endParaRPr>
+          </a:p>
+        </p:txBody>
+      </p:sp>
+    </p:spTree>
+  </p:cSld>
+  <p:clrMapOvr>
+    <a:masterClrMapping/>
+  </p:clrMapOvr>
+</p:sld>
+</file>
+
+<file path=ppt/slides/slide7.xml><?xml version="1.0" encoding="utf-8"?>
+<p:sld xmlns:a="http://schemas.openxmlformats.org/drawingml/2006/main" xmlns:p="http://schemas.openxmlformats.org/presentationml/2006/main">
+  <p:cSld>
+    <p:spTree>
+      <p:nvGrpSpPr>
+        <p:cNvPr id="97" name="Shape 97"/>
+        <p:cNvGrpSpPr/>
+        <p:nvPr/>
+      </p:nvGrpSpPr>
+      <p:grpSpPr>
+        <a:xfrm>
+          <a:off x="0" y="0"/>
+          <a:ext cx="0" cy="0"/>
+          <a:chOff x="0" y="0"/>
+          <a:chExt cx="0" cy="0"/>
+        </a:xfrm>
+      </p:grpSpPr>
+      <p:sp>
+        <p:nvSpPr>
+          <p:cNvPr id="98" name="Google Shape;98;p15"/>
+          <p:cNvSpPr txBox="1"/>
+          <p:nvPr>
+            <p:ph type="title"/>
+          </p:nvPr>
+        </p:nvSpPr>
+        <p:spPr>
+          <a:xfrm>
+            <a:off x="311700" y="445025"/>
+            <a:ext cx="8520600" cy="572700"/>
+          </a:xfrm>
+          <a:prstGeom prst="rect">
+            <a:avLst/>
+          </a:prstGeom>
+        </p:spPr>
+        <p:txBody>
+          <a:bodyPr anchorCtr="0" anchor="t" bIns="91425" lIns="91425" spcFirstLastPara="1" rIns="91425" wrap="square" tIns="91425">
+            <a:normAutofit fontScale="90000"/>
+          </a:bodyPr>
+          <a:lstStyle/>
+          <a:p>
+            <a:pPr indent="0" lvl="0" marL="0" rtl="0" algn="l">
+              <a:spcBef>
+                <a:spcPts val="0"/>
+              </a:spcBef>
+              <a:spcAft>
+                <a:spcPts val="0"/>
+              </a:spcAft>
+              <a:buNone/>
+            </a:pPr>
+            <a:r>
+              <a:rPr lang="en" sz="3000">
+                <a:solidFill>
+                  <a:schemeClr val="accent3"/>
+                </a:solidFill>
+                <a:latin typeface="Average"/>
+                <a:ea typeface="Average"/>
+                <a:cs typeface="Average"/>
+                <a:sym typeface="Average"/>
+              </a:rPr>
+              <a:t>Asset Store screenshot order</a:t>
+            </a:r>
+            <a:endParaRPr sz="3000">
+              <a:solidFill>
+                <a:schemeClr val="accent3"/>
+              </a:solidFill>
+              <a:latin typeface="Average"/>
+              <a:ea typeface="Average"/>
+              <a:cs typeface="Average"/>
+              <a:sym typeface="Average"/>
+            </a:endParaRPr>
+          </a:p>
+        </p:txBody>
+      </p:sp>
+      <p:sp>
+        <p:nvSpPr>
+          <p:cNvPr id="99" name="Google Shape;99;p15"/>
+          <p:cNvSpPr txBox="1"/>
+          <p:nvPr>
+            <p:ph idx="1" type="body"/>
+          </p:nvPr>
+        </p:nvSpPr>
+        <p:spPr>
+          <a:xfrm>
+            <a:off x="311700" y="1152475"/>
+            <a:ext cx="8520600" cy="3416400"/>
+          </a:xfrm>
+          <a:prstGeom prst="rect">
+            <a:avLst/>
+          </a:prstGeom>
+        </p:spPr>
+        <p:txBody>
+          <a:bodyPr anchorCtr="0" anchor="t" bIns="91425" lIns="91425" spcFirstLastPara="1" rIns="91425" wrap="square" tIns="91425">
+            <a:normAutofit/>
+          </a:bodyPr>
+          <a:lstStyle/>
+          <a:p>
+            <a:pPr indent="0" lvl="0" marL="0" rtl="0" algn="l">
+              <a:spcBef>
+                <a:spcPts val="0"/>
+              </a:spcBef>
+              <a:spcAft>
+                <a:spcPts val="1200"/>
+              </a:spcAft>
+              <a:buNone/>
+            </a:pPr>
+            <a:r>
+              <a:rPr lang="en" sz="2200">
+                <a:solidFill>
+                  <a:schemeClr val="dk2"/>
+                </a:solidFill>
+              </a:rPr>
+              <a:t>1. Title slide: product identity and positioning</a:t>
+            </a:r>
+            <a:endParaRPr sz="2200">
+              <a:solidFill>
+                <a:schemeClr val="dk2"/>
+              </a:solidFill>
+            </a:endParaRPr>
+          </a:p>
+          <a:p>
+            <a:pPr indent="0" lvl="0" marL="0" rtl="0" algn="l">
+              <a:spcBef>
+                <a:spcPts val="0"/>
+              </a:spcBef>
+              <a:spcAft>
+                <a:spcPts val="1200"/>
+              </a:spcAft>
+              <a:buNone/>
+            </a:pPr>
+            <a:r>
+              <a:rPr lang="en" sz="2200">
+                <a:solidFill>
+                  <a:schemeClr val="dk2"/>
+                </a:solidFill>
+              </a:rPr>
+              <a:t>2. Architecture: UI inventory is separated from your game data</a:t>
+            </a:r>
+            <a:endParaRPr sz="2200">
+              <a:solidFill>
+                <a:schemeClr val="dk2"/>
+              </a:solidFill>
+            </a:endParaRPr>
+          </a:p>
+          <a:p>
+            <a:pPr indent="0" lvl="0" marL="0" rtl="0" algn="l">
+              <a:spcBef>
+                <a:spcPts val="0"/>
+              </a:spcBef>
+              <a:spcAft>
+                <a:spcPts val="1200"/>
+              </a:spcAft>
+              <a:buNone/>
+            </a:pPr>
+            <a:r>
+              <a:rPr lang="en" sz="2200">
+                <a:solidFill>
+                  <a:schemeClr val="dk2"/>
+                </a:solidFill>
+              </a:rPr>
+              <a:t>3. Feature overview: supported workflows and interaction systems</a:t>
+            </a:r>
+            <a:endParaRPr sz="2200">
+              <a:solidFill>
+                <a:schemeClr val="dk2"/>
+              </a:solidFill>
+            </a:endParaRPr>
+          </a:p>
+          <a:p>
+            <a:pPr indent="0" lvl="0" marL="0" rtl="0" algn="l">
+              <a:spcBef>
+                <a:spcPts val="0"/>
+              </a:spcBef>
+              <a:spcAft>
+                <a:spcPts val="1200"/>
+              </a:spcAft>
+              <a:buNone/>
+            </a:pPr>
+            <a:r>
+              <a:rPr lang="en" sz="2200">
+                <a:solidFill>
+                  <a:schemeClr val="dk2"/>
+                </a:solidFill>
+              </a:rPr>
+              <a:t>4. Demos: show breadth from basic inventory to trading and containers</a:t>
+            </a:r>
+            <a:endParaRPr sz="2200">
+              <a:solidFill>
+                <a:schemeClr val="dk2"/>
+              </a:solidFill>
+            </a:endParaRPr>
+          </a:p>
+          <a:p>
+            <a:pPr indent="0" lvl="0" marL="0" rtl="0" algn="l">
+              <a:spcBef>
+                <a:spcPts val="0"/>
+              </a:spcBef>
+              <a:spcAft>
+                <a:spcPts val="1200"/>
+              </a:spcAft>
+              <a:buNone/>
+            </a:pPr>
+            <a:r>
+              <a:rPr lang="en" sz="2200">
+                <a:solidFill>
+                  <a:schemeClr val="dk2"/>
+                </a:solidFill>
+              </a:rPr>
+              <a:t>5. Integration + pipeline: explain why the asset scales beyond a simple slot grid</a:t>
+            </a:r>
+            <a:endParaRPr sz="2200">
+              <a:solidFill>
+                <a:schemeClr val="dk2"/>
+              </a:solidFill>
+            </a:endParaRPr>
           </a:p>
         </p:txBody>
       </p:sp>
